--- a/paper/architecture-of-intent.pptx
+++ b/paper/architecture-of-intent.pptx
@@ -12936,7 +12936,7 @@
                 </a:solidFill>
                 <a:latin typeface="Calibri"/>
               </a:rPr>
-              <a:t>Multi-tenant fleet governance is missing</a:t>
+              <a:t>Fleet governance scales to ~50 tenants</a:t>
             </a:r>
           </a:p>
         </p:txBody>
@@ -12971,7 +12971,7 @@
                 </a:solidFill>
                 <a:latin typeface="Calibri"/>
               </a:rPr>
-              <a:t>The framework currently does not address governance of large fleets of agents at scale.</a:t>
+              <a:t>v2.4.0 added a Multi-Tenant Fleet Governance chapter (Operations) with four moves: constraint inheritance, cross-tenant isolation, partitioned telemetry, platform-tier failure-locus. At hundreds of tenants, additional org machinery is needed.</a:t>
             </a:r>
           </a:p>
         </p:txBody>
